--- a/AI-tools/SQL-with-ai/text_to_SQL.pptx
+++ b/AI-tools/SQL-with-ai/text_to_SQL.pptx
@@ -5,22 +5,23 @@
     <p:sldMasterId id="2147483648" r:id="rId1"/>
   </p:sldMasterIdLst>
   <p:notesMasterIdLst>
-    <p:notesMasterId r:id="rId12"/>
+    <p:notesMasterId r:id="rId13"/>
   </p:notesMasterIdLst>
   <p:handoutMasterIdLst>
-    <p:handoutMasterId r:id="rId13"/>
+    <p:handoutMasterId r:id="rId14"/>
   </p:handoutMasterIdLst>
   <p:sldIdLst>
     <p:sldId id="257" r:id="rId2"/>
-    <p:sldId id="276" r:id="rId3"/>
-    <p:sldId id="275" r:id="rId4"/>
-    <p:sldId id="278" r:id="rId5"/>
-    <p:sldId id="279" r:id="rId6"/>
-    <p:sldId id="280" r:id="rId7"/>
-    <p:sldId id="277" r:id="rId8"/>
-    <p:sldId id="282" r:id="rId9"/>
-    <p:sldId id="281" r:id="rId10"/>
-    <p:sldId id="283" r:id="rId11"/>
+    <p:sldId id="284" r:id="rId3"/>
+    <p:sldId id="276" r:id="rId4"/>
+    <p:sldId id="275" r:id="rId5"/>
+    <p:sldId id="278" r:id="rId6"/>
+    <p:sldId id="279" r:id="rId7"/>
+    <p:sldId id="280" r:id="rId8"/>
+    <p:sldId id="277" r:id="rId9"/>
+    <p:sldId id="282" r:id="rId10"/>
+    <p:sldId id="281" r:id="rId11"/>
+    <p:sldId id="283" r:id="rId12"/>
   </p:sldIdLst>
   <p:sldSz cx="12192000" cy="6858000"/>
   <p:notesSz cx="6858000" cy="9144000"/>
@@ -224,7 +225,7 @@
           <a:p>
             <a:fld id="{7BAEECA8-D063-486F-AE31-5020270C1449}" type="datetimeFigureOut">
               <a:rPr lang="en-US" smtClean="0"/>
-              <a:t>5/5/2026</a:t>
+              <a:t>5/15/2026</a:t>
             </a:fld>
             <a:endParaRPr lang="en-US"/>
           </a:p>
@@ -401,7 +402,7 @@
           <a:p>
             <a:fld id="{CB233BD1-3BA8-448D-9D08-7846095EA517}" type="datetimeFigureOut">
               <a:rPr lang="en-US" smtClean="0"/>
-              <a:t>5/5/2026</a:t>
+              <a:t>5/15/2026</a:t>
             </a:fld>
             <a:endParaRPr lang="en-US"/>
           </a:p>
@@ -815,7 +816,7 @@
           <a:p>
             <a:fld id="{6383FAE1-13DE-4511-8C1B-C8AFB720664C}" type="datetimeFigureOut">
               <a:rPr lang="en-US" smtClean="0"/>
-              <a:t>5/5/2026</a:t>
+              <a:t>5/15/2026</a:t>
             </a:fld>
             <a:endParaRPr lang="en-US"/>
           </a:p>
@@ -1013,7 +1014,7 @@
           <a:p>
             <a:fld id="{6383FAE1-13DE-4511-8C1B-C8AFB720664C}" type="datetimeFigureOut">
               <a:rPr lang="en-US" smtClean="0"/>
-              <a:t>5/5/2026</a:t>
+              <a:t>5/15/2026</a:t>
             </a:fld>
             <a:endParaRPr lang="en-US"/>
           </a:p>
@@ -1221,7 +1222,7 @@
           <a:p>
             <a:fld id="{6383FAE1-13DE-4511-8C1B-C8AFB720664C}" type="datetimeFigureOut">
               <a:rPr lang="en-US" smtClean="0"/>
-              <a:t>5/5/2026</a:t>
+              <a:t>5/15/2026</a:t>
             </a:fld>
             <a:endParaRPr lang="en-US"/>
           </a:p>
@@ -1419,7 +1420,7 @@
           <a:p>
             <a:fld id="{6383FAE1-13DE-4511-8C1B-C8AFB720664C}" type="datetimeFigureOut">
               <a:rPr lang="en-US" smtClean="0"/>
-              <a:t>5/5/2026</a:t>
+              <a:t>5/15/2026</a:t>
             </a:fld>
             <a:endParaRPr lang="en-US"/>
           </a:p>
@@ -1694,7 +1695,7 @@
           <a:p>
             <a:fld id="{6383FAE1-13DE-4511-8C1B-C8AFB720664C}" type="datetimeFigureOut">
               <a:rPr lang="en-US" smtClean="0"/>
-              <a:t>5/5/2026</a:t>
+              <a:t>5/15/2026</a:t>
             </a:fld>
             <a:endParaRPr lang="en-US"/>
           </a:p>
@@ -1959,7 +1960,7 @@
           <a:p>
             <a:fld id="{6383FAE1-13DE-4511-8C1B-C8AFB720664C}" type="datetimeFigureOut">
               <a:rPr lang="en-US" smtClean="0"/>
-              <a:t>5/5/2026</a:t>
+              <a:t>5/15/2026</a:t>
             </a:fld>
             <a:endParaRPr lang="en-US"/>
           </a:p>
@@ -2371,7 +2372,7 @@
           <a:p>
             <a:fld id="{6383FAE1-13DE-4511-8C1B-C8AFB720664C}" type="datetimeFigureOut">
               <a:rPr lang="en-US" smtClean="0"/>
-              <a:t>5/5/2026</a:t>
+              <a:t>5/15/2026</a:t>
             </a:fld>
             <a:endParaRPr lang="en-US"/>
           </a:p>
@@ -2512,7 +2513,7 @@
           <a:p>
             <a:fld id="{6383FAE1-13DE-4511-8C1B-C8AFB720664C}" type="datetimeFigureOut">
               <a:rPr lang="en-US" smtClean="0"/>
-              <a:t>5/5/2026</a:t>
+              <a:t>5/15/2026</a:t>
             </a:fld>
             <a:endParaRPr lang="en-US"/>
           </a:p>
@@ -2625,7 +2626,7 @@
           <a:p>
             <a:fld id="{6383FAE1-13DE-4511-8C1B-C8AFB720664C}" type="datetimeFigureOut">
               <a:rPr lang="en-US" smtClean="0"/>
-              <a:t>5/5/2026</a:t>
+              <a:t>5/15/2026</a:t>
             </a:fld>
             <a:endParaRPr lang="en-US"/>
           </a:p>
@@ -2936,7 +2937,7 @@
           <a:p>
             <a:fld id="{6383FAE1-13DE-4511-8C1B-C8AFB720664C}" type="datetimeFigureOut">
               <a:rPr lang="en-US" smtClean="0"/>
-              <a:t>5/5/2026</a:t>
+              <a:t>5/15/2026</a:t>
             </a:fld>
             <a:endParaRPr lang="en-US"/>
           </a:p>
@@ -3227,7 +3228,7 @@
           <a:p>
             <a:fld id="{6383FAE1-13DE-4511-8C1B-C8AFB720664C}" type="datetimeFigureOut">
               <a:rPr lang="en-US" smtClean="0"/>
-              <a:t>5/5/2026</a:t>
+              <a:t>5/15/2026</a:t>
             </a:fld>
             <a:endParaRPr lang="en-US"/>
           </a:p>
@@ -3471,7 +3472,7 @@
           <a:p>
             <a:fld id="{6383FAE1-13DE-4511-8C1B-C8AFB720664C}" type="datetimeFigureOut">
               <a:rPr lang="en-US" smtClean="0"/>
-              <a:t>5/5/2026</a:t>
+              <a:t>5/15/2026</a:t>
             </a:fld>
             <a:endParaRPr lang="en-US"/>
           </a:p>
@@ -4051,6 +4052,102 @@
         <p:cNvPr id="1" name="">
           <a:extLst>
             <a:ext uri="{FF2B5EF4-FFF2-40B4-BE49-F238E27FC236}">
+              <a16:creationId xmlns:a16="http://schemas.microsoft.com/office/drawing/2014/main" id="{911095DE-B1E4-1010-D508-B55A821988E0}"/>
+            </a:ext>
+          </a:extLst>
+        </p:cNvPr>
+        <p:cNvGrpSpPr/>
+        <p:nvPr/>
+      </p:nvGrpSpPr>
+      <p:grpSpPr>
+        <a:xfrm>
+          <a:off x="0" y="0"/>
+          <a:ext cx="0" cy="0"/>
+          <a:chOff x="0" y="0"/>
+          <a:chExt cx="0" cy="0"/>
+        </a:xfrm>
+      </p:grpSpPr>
+      <p:pic>
+        <p:nvPicPr>
+          <p:cNvPr id="7" name="Picture 6">
+            <a:extLst>
+              <a:ext uri="{FF2B5EF4-FFF2-40B4-BE49-F238E27FC236}">
+                <a16:creationId xmlns:a16="http://schemas.microsoft.com/office/drawing/2014/main" id="{566BABD6-7514-A3AC-FF93-B6514E1EC430}"/>
+              </a:ext>
+            </a:extLst>
+          </p:cNvPr>
+          <p:cNvPicPr>
+            <a:picLocks noChangeAspect="1"/>
+          </p:cNvPicPr>
+          <p:nvPr/>
+        </p:nvPicPr>
+        <p:blipFill>
+          <a:blip r:embed="rId2"/>
+          <a:stretch>
+            <a:fillRect/>
+          </a:stretch>
+        </p:blipFill>
+        <p:spPr>
+          <a:xfrm>
+            <a:off x="266808" y="173737"/>
+            <a:ext cx="9954650" cy="3039408"/>
+          </a:xfrm>
+          <a:prstGeom prst="rect">
+            <a:avLst/>
+          </a:prstGeom>
+        </p:spPr>
+      </p:pic>
+      <p:pic>
+        <p:nvPicPr>
+          <p:cNvPr id="9" name="Picture 8">
+            <a:extLst>
+              <a:ext uri="{FF2B5EF4-FFF2-40B4-BE49-F238E27FC236}">
+                <a16:creationId xmlns:a16="http://schemas.microsoft.com/office/drawing/2014/main" id="{4542953C-6A38-36D6-A0D0-CD2CCBF8C553}"/>
+              </a:ext>
+            </a:extLst>
+          </p:cNvPr>
+          <p:cNvPicPr>
+            <a:picLocks noChangeAspect="1"/>
+          </p:cNvPicPr>
+          <p:nvPr/>
+        </p:nvPicPr>
+        <p:blipFill>
+          <a:blip r:embed="rId3"/>
+          <a:stretch>
+            <a:fillRect/>
+          </a:stretch>
+        </p:blipFill>
+        <p:spPr>
+          <a:xfrm>
+            <a:off x="2083703" y="2683110"/>
+            <a:ext cx="8695189" cy="4001153"/>
+          </a:xfrm>
+          <a:prstGeom prst="rect">
+            <a:avLst/>
+          </a:prstGeom>
+        </p:spPr>
+      </p:pic>
+    </p:spTree>
+    <p:extLst>
+      <p:ext uri="{BB962C8B-B14F-4D97-AF65-F5344CB8AC3E}">
+        <p14:creationId xmlns:p14="http://schemas.microsoft.com/office/powerpoint/2010/main" val="3220598409"/>
+      </p:ext>
+    </p:extLst>
+  </p:cSld>
+  <p:clrMapOvr>
+    <a:masterClrMapping/>
+  </p:clrMapOvr>
+</p:sld>
+</file>
+
+<file path=ppt/slides/slide11.xml><?xml version="1.0" encoding="utf-8"?>
+<p:sld xmlns:a="http://schemas.openxmlformats.org/drawingml/2006/main" xmlns:r="http://schemas.openxmlformats.org/officeDocument/2006/relationships" xmlns:p="http://schemas.openxmlformats.org/presentationml/2006/main">
+  <p:cSld>
+    <p:spTree>
+      <p:nvGrpSpPr>
+        <p:cNvPr id="1" name="">
+          <a:extLst>
+            <a:ext uri="{FF2B5EF4-FFF2-40B4-BE49-F238E27FC236}">
               <a16:creationId xmlns:a16="http://schemas.microsoft.com/office/drawing/2014/main" id="{DDC3A119-92B7-9E9E-65B5-8ABBEEB5E1BF}"/>
             </a:ext>
           </a:extLst>
@@ -4207,6 +4304,136 @@
 </file>
 
 <file path=ppt/slides/slide2.xml><?xml version="1.0" encoding="utf-8"?>
+<p:sld xmlns:a="http://schemas.openxmlformats.org/drawingml/2006/main" xmlns:r="http://schemas.openxmlformats.org/officeDocument/2006/relationships" xmlns:p="http://schemas.openxmlformats.org/presentationml/2006/main">
+  <p:cSld>
+    <p:spTree>
+      <p:nvGrpSpPr>
+        <p:cNvPr id="1" name="">
+          <a:extLst>
+            <a:ext uri="{FF2B5EF4-FFF2-40B4-BE49-F238E27FC236}">
+              <a16:creationId xmlns:a16="http://schemas.microsoft.com/office/drawing/2014/main" id="{CEB91E50-94D2-7592-5AE8-D8DBF537AFCA}"/>
+            </a:ext>
+          </a:extLst>
+        </p:cNvPr>
+        <p:cNvGrpSpPr/>
+        <p:nvPr/>
+      </p:nvGrpSpPr>
+      <p:grpSpPr>
+        <a:xfrm>
+          <a:off x="0" y="0"/>
+          <a:ext cx="0" cy="0"/>
+          <a:chOff x="0" y="0"/>
+          <a:chExt cx="0" cy="0"/>
+        </a:xfrm>
+      </p:grpSpPr>
+      <p:pic>
+        <p:nvPicPr>
+          <p:cNvPr id="3" name="Picture 2">
+            <a:extLst>
+              <a:ext uri="{FF2B5EF4-FFF2-40B4-BE49-F238E27FC236}">
+                <a16:creationId xmlns:a16="http://schemas.microsoft.com/office/drawing/2014/main" id="{45014E9B-A7DE-BD3A-C18F-A534EA550EE2}"/>
+              </a:ext>
+            </a:extLst>
+          </p:cNvPr>
+          <p:cNvPicPr>
+            <a:picLocks noChangeAspect="1"/>
+          </p:cNvPicPr>
+          <p:nvPr/>
+        </p:nvPicPr>
+        <p:blipFill>
+          <a:blip r:embed="rId2"/>
+          <a:stretch>
+            <a:fillRect/>
+          </a:stretch>
+        </p:blipFill>
+        <p:spPr>
+          <a:xfrm>
+            <a:off x="146303" y="1170432"/>
+            <a:ext cx="11927183" cy="5480057"/>
+          </a:xfrm>
+          <a:prstGeom prst="rect">
+            <a:avLst/>
+          </a:prstGeom>
+        </p:spPr>
+      </p:pic>
+      <p:sp>
+        <p:nvSpPr>
+          <p:cNvPr id="4" name="TextBox 3">
+            <a:extLst>
+              <a:ext uri="{FF2B5EF4-FFF2-40B4-BE49-F238E27FC236}">
+                <a16:creationId xmlns:a16="http://schemas.microsoft.com/office/drawing/2014/main" id="{E3E690D0-B1A2-8D09-AA78-1B279A9A464D}"/>
+              </a:ext>
+            </a:extLst>
+          </p:cNvPr>
+          <p:cNvSpPr txBox="1"/>
+          <p:nvPr/>
+        </p:nvSpPr>
+        <p:spPr>
+          <a:xfrm>
+            <a:off x="3236976" y="426967"/>
+            <a:ext cx="4186146" cy="461665"/>
+          </a:xfrm>
+          <a:prstGeom prst="rect">
+            <a:avLst/>
+          </a:prstGeom>
+          <a:noFill/>
+        </p:spPr>
+        <p:txBody>
+          <a:bodyPr wrap="none" rtlCol="0">
+            <a:spAutoFit/>
+          </a:bodyPr>
+          <a:lstStyle/>
+          <a:p>
+            <a:r>
+              <a:rPr lang="en-US" sz="2400" dirty="0">
+                <a:solidFill>
+                  <a:schemeClr val="accent6">
+                    <a:lumMod val="60000"/>
+                    <a:lumOff val="40000"/>
+                  </a:schemeClr>
+                </a:solidFill>
+              </a:rPr>
+              <a:t>Different </a:t>
+            </a:r>
+            <a:r>
+              <a:rPr lang="en-US" sz="2400" dirty="0" err="1">
+                <a:solidFill>
+                  <a:schemeClr val="accent6">
+                    <a:lumMod val="60000"/>
+                    <a:lumOff val="40000"/>
+                  </a:schemeClr>
+                </a:solidFill>
+              </a:rPr>
+              <a:t>sql</a:t>
+            </a:r>
+            <a:r>
+              <a:rPr lang="en-US" sz="2400" dirty="0">
+                <a:solidFill>
+                  <a:schemeClr val="accent6">
+                    <a:lumMod val="60000"/>
+                    <a:lumOff val="40000"/>
+                  </a:schemeClr>
+                </a:solidFill>
+              </a:rPr>
+              <a:t> to ai tools available</a:t>
+            </a:r>
+          </a:p>
+        </p:txBody>
+      </p:sp>
+    </p:spTree>
+    <p:extLst>
+      <p:ext uri="{BB962C8B-B14F-4D97-AF65-F5344CB8AC3E}">
+        <p14:creationId xmlns:p14="http://schemas.microsoft.com/office/powerpoint/2010/main" val="3516231365"/>
+      </p:ext>
+    </p:extLst>
+  </p:cSld>
+  <p:clrMapOvr>
+    <a:masterClrMapping/>
+  </p:clrMapOvr>
+</p:sld>
+</file>
+
+<file path=ppt/slides/slide3.xml><?xml version="1.0" encoding="utf-8"?>
 <p:sld xmlns:a="http://schemas.openxmlformats.org/drawingml/2006/main" xmlns:r="http://schemas.openxmlformats.org/officeDocument/2006/relationships" xmlns:p="http://schemas.openxmlformats.org/presentationml/2006/main">
   <p:cSld>
     <p:spTree>
@@ -4244,7 +4471,7 @@
         <p:spPr>
           <a:xfrm>
             <a:off x="477520" y="226536"/>
-            <a:ext cx="10292080" cy="461665"/>
+            <a:ext cx="10292080" cy="830997"/>
           </a:xfrm>
           <a:prstGeom prst="rect">
             <a:avLst/>
@@ -4294,14 +4521,30 @@
               <a:t>)</a:t>
             </a:r>
           </a:p>
+          <a:p>
+            <a:pPr algn="ctr">
+              <a:buNone/>
+            </a:pPr>
+            <a:r>
+              <a:rPr lang="en-US" sz="2400" dirty="0">
+                <a:solidFill>
+                  <a:schemeClr val="accent6">
+                    <a:lumMod val="60000"/>
+                    <a:lumOff val="40000"/>
+                  </a:schemeClr>
+                </a:solidFill>
+              </a:rPr>
+              <a:t>7-day free trial: Have to pay now</a:t>
+            </a:r>
+          </a:p>
         </p:txBody>
       </p:sp>
       <p:pic>
         <p:nvPicPr>
-          <p:cNvPr id="5" name="Picture 4">
-            <a:extLst>
-              <a:ext uri="{FF2B5EF4-FFF2-40B4-BE49-F238E27FC236}">
-                <a16:creationId xmlns:a16="http://schemas.microsoft.com/office/drawing/2014/main" id="{C3F624BF-094B-ECBF-0BE5-BDF433609F42}"/>
+          <p:cNvPr id="3" name="Picture 2">
+            <a:extLst>
+              <a:ext uri="{FF2B5EF4-FFF2-40B4-BE49-F238E27FC236}">
+                <a16:creationId xmlns:a16="http://schemas.microsoft.com/office/drawing/2014/main" id="{63F92AD6-24D2-5172-C4D5-8FFFB597E0C1}"/>
               </a:ext>
             </a:extLst>
           </p:cNvPr>
@@ -4318,8 +4561,8 @@
         </p:blipFill>
         <p:spPr>
           <a:xfrm>
-            <a:off x="1727291" y="1214335"/>
-            <a:ext cx="7792537" cy="4191585"/>
+            <a:off x="173736" y="1028702"/>
+            <a:ext cx="11195304" cy="5430351"/>
           </a:xfrm>
           <a:prstGeom prst="rect">
             <a:avLst/>
@@ -4339,7 +4582,7 @@
 </p:sld>
 </file>
 
-<file path=ppt/slides/slide3.xml><?xml version="1.0" encoding="utf-8"?>
+<file path=ppt/slides/slide4.xml><?xml version="1.0" encoding="utf-8"?>
 <p:sld xmlns:a="http://schemas.openxmlformats.org/drawingml/2006/main" xmlns:r="http://schemas.openxmlformats.org/officeDocument/2006/relationships" xmlns:p="http://schemas.openxmlformats.org/presentationml/2006/main">
   <p:cSld>
     <p:spTree>
@@ -4384,8 +4627,8 @@
         </p:blipFill>
         <p:spPr>
           <a:xfrm>
-            <a:off x="633744" y="1444752"/>
-            <a:ext cx="9379840" cy="3317552"/>
+            <a:off x="487439" y="1325880"/>
+            <a:ext cx="10491527" cy="3710744"/>
           </a:xfrm>
           <a:prstGeom prst="rect">
             <a:avLst/>
@@ -4405,7 +4648,7 @@
 </p:sld>
 </file>
 
-<file path=ppt/slides/slide4.xml><?xml version="1.0" encoding="utf-8"?>
+<file path=ppt/slides/slide5.xml><?xml version="1.0" encoding="utf-8"?>
 <p:sld xmlns:a="http://schemas.openxmlformats.org/drawingml/2006/main" xmlns:r="http://schemas.openxmlformats.org/officeDocument/2006/relationships" xmlns:p="http://schemas.openxmlformats.org/presentationml/2006/main">
   <p:cSld>
     <p:spTree>
@@ -4450,8 +4693,8 @@
         </p:blipFill>
         <p:spPr>
           <a:xfrm>
-            <a:off x="1091284" y="1417320"/>
-            <a:ext cx="8766952" cy="3153135"/>
+            <a:off x="844395" y="1225296"/>
+            <a:ext cx="10216115" cy="3674343"/>
           </a:xfrm>
           <a:prstGeom prst="rect">
             <a:avLst/>
@@ -4471,7 +4714,7 @@
 </p:sld>
 </file>
 
-<file path=ppt/slides/slide5.xml><?xml version="1.0" encoding="utf-8"?>
+<file path=ppt/slides/slide6.xml><?xml version="1.0" encoding="utf-8"?>
 <p:sld xmlns:a="http://schemas.openxmlformats.org/drawingml/2006/main" xmlns:r="http://schemas.openxmlformats.org/officeDocument/2006/relationships" xmlns:p="http://schemas.openxmlformats.org/presentationml/2006/main">
   <p:cSld>
     <p:spTree>
@@ -4516,8 +4759,8 @@
         </p:blipFill>
         <p:spPr>
           <a:xfrm>
-            <a:off x="816311" y="1453896"/>
-            <a:ext cx="8775645" cy="3329547"/>
+            <a:off x="752303" y="1335024"/>
+            <a:ext cx="10028883" cy="3805035"/>
           </a:xfrm>
           <a:prstGeom prst="rect">
             <a:avLst/>
@@ -4537,7 +4780,7 @@
 </p:sld>
 </file>
 
-<file path=ppt/slides/slide6.xml><?xml version="1.0" encoding="utf-8"?>
+<file path=ppt/slides/slide7.xml><?xml version="1.0" encoding="utf-8"?>
 <p:sld xmlns:a="http://schemas.openxmlformats.org/drawingml/2006/main" xmlns:r="http://schemas.openxmlformats.org/officeDocument/2006/relationships" xmlns:p="http://schemas.openxmlformats.org/presentationml/2006/main">
   <p:cSld>
     <p:spTree>
@@ -4582,8 +4825,8 @@
         </p:blipFill>
         <p:spPr>
           <a:xfrm>
-            <a:off x="649113" y="1591056"/>
-            <a:ext cx="9709919" cy="3276419"/>
+            <a:off x="649113" y="1316736"/>
+            <a:ext cx="10522887" cy="3550739"/>
           </a:xfrm>
           <a:prstGeom prst="rect">
             <a:avLst/>
@@ -4603,7 +4846,7 @@
 </p:sld>
 </file>
 
-<file path=ppt/slides/slide7.xml><?xml version="1.0" encoding="utf-8"?>
+<file path=ppt/slides/slide8.xml><?xml version="1.0" encoding="utf-8"?>
 <p:sld xmlns:a="http://schemas.openxmlformats.org/drawingml/2006/main" xmlns:r="http://schemas.openxmlformats.org/officeDocument/2006/relationships" xmlns:p="http://schemas.openxmlformats.org/presentationml/2006/main">
   <p:cSld>
     <p:spTree>
@@ -4648,8 +4891,8 @@
         </p:blipFill>
         <p:spPr>
           <a:xfrm>
-            <a:off x="519998" y="1133856"/>
-            <a:ext cx="9989719" cy="4000357"/>
+            <a:off x="501710" y="1207008"/>
+            <a:ext cx="10583415" cy="4238101"/>
           </a:xfrm>
           <a:prstGeom prst="rect">
             <a:avLst/>
@@ -4669,7 +4912,7 @@
 </p:sld>
 </file>
 
-<file path=ppt/slides/slide8.xml><?xml version="1.0" encoding="utf-8"?>
+<file path=ppt/slides/slide9.xml><?xml version="1.0" encoding="utf-8"?>
 <p:sld xmlns:a="http://schemas.openxmlformats.org/drawingml/2006/main" xmlns:r="http://schemas.openxmlformats.org/officeDocument/2006/relationships" xmlns:p="http://schemas.openxmlformats.org/presentationml/2006/main">
   <p:cSld>
     <p:spTree>
@@ -4714,8 +4957,8 @@
         </p:blipFill>
         <p:spPr>
           <a:xfrm>
-            <a:off x="968372" y="896112"/>
-            <a:ext cx="9344351" cy="4198498"/>
+            <a:off x="511172" y="1178875"/>
+            <a:ext cx="10015943" cy="4500250"/>
           </a:xfrm>
           <a:prstGeom prst="rect">
             <a:avLst/>
@@ -4726,102 +4969,6 @@
     <p:extLst>
       <p:ext uri="{BB962C8B-B14F-4D97-AF65-F5344CB8AC3E}">
         <p14:creationId xmlns:p14="http://schemas.microsoft.com/office/powerpoint/2010/main" val="2973192680"/>
-      </p:ext>
-    </p:extLst>
-  </p:cSld>
-  <p:clrMapOvr>
-    <a:masterClrMapping/>
-  </p:clrMapOvr>
-</p:sld>
-</file>
-
-<file path=ppt/slides/slide9.xml><?xml version="1.0" encoding="utf-8"?>
-<p:sld xmlns:a="http://schemas.openxmlformats.org/drawingml/2006/main" xmlns:r="http://schemas.openxmlformats.org/officeDocument/2006/relationships" xmlns:p="http://schemas.openxmlformats.org/presentationml/2006/main">
-  <p:cSld>
-    <p:spTree>
-      <p:nvGrpSpPr>
-        <p:cNvPr id="1" name="">
-          <a:extLst>
-            <a:ext uri="{FF2B5EF4-FFF2-40B4-BE49-F238E27FC236}">
-              <a16:creationId xmlns:a16="http://schemas.microsoft.com/office/drawing/2014/main" id="{911095DE-B1E4-1010-D508-B55A821988E0}"/>
-            </a:ext>
-          </a:extLst>
-        </p:cNvPr>
-        <p:cNvGrpSpPr/>
-        <p:nvPr/>
-      </p:nvGrpSpPr>
-      <p:grpSpPr>
-        <a:xfrm>
-          <a:off x="0" y="0"/>
-          <a:ext cx="0" cy="0"/>
-          <a:chOff x="0" y="0"/>
-          <a:chExt cx="0" cy="0"/>
-        </a:xfrm>
-      </p:grpSpPr>
-      <p:pic>
-        <p:nvPicPr>
-          <p:cNvPr id="7" name="Picture 6">
-            <a:extLst>
-              <a:ext uri="{FF2B5EF4-FFF2-40B4-BE49-F238E27FC236}">
-                <a16:creationId xmlns:a16="http://schemas.microsoft.com/office/drawing/2014/main" id="{566BABD6-7514-A3AC-FF93-B6514E1EC430}"/>
-              </a:ext>
-            </a:extLst>
-          </p:cNvPr>
-          <p:cNvPicPr>
-            <a:picLocks noChangeAspect="1"/>
-          </p:cNvPicPr>
-          <p:nvPr/>
-        </p:nvPicPr>
-        <p:blipFill>
-          <a:blip r:embed="rId2"/>
-          <a:stretch>
-            <a:fillRect/>
-          </a:stretch>
-        </p:blipFill>
-        <p:spPr>
-          <a:xfrm>
-            <a:off x="266808" y="173737"/>
-            <a:ext cx="9954650" cy="3039408"/>
-          </a:xfrm>
-          <a:prstGeom prst="rect">
-            <a:avLst/>
-          </a:prstGeom>
-        </p:spPr>
-      </p:pic>
-      <p:pic>
-        <p:nvPicPr>
-          <p:cNvPr id="9" name="Picture 8">
-            <a:extLst>
-              <a:ext uri="{FF2B5EF4-FFF2-40B4-BE49-F238E27FC236}">
-                <a16:creationId xmlns:a16="http://schemas.microsoft.com/office/drawing/2014/main" id="{4542953C-6A38-36D6-A0D0-CD2CCBF8C553}"/>
-              </a:ext>
-            </a:extLst>
-          </p:cNvPr>
-          <p:cNvPicPr>
-            <a:picLocks noChangeAspect="1"/>
-          </p:cNvPicPr>
-          <p:nvPr/>
-        </p:nvPicPr>
-        <p:blipFill>
-          <a:blip r:embed="rId3"/>
-          <a:stretch>
-            <a:fillRect/>
-          </a:stretch>
-        </p:blipFill>
-        <p:spPr>
-          <a:xfrm>
-            <a:off x="2083703" y="2683110"/>
-            <a:ext cx="8695189" cy="4001153"/>
-          </a:xfrm>
-          <a:prstGeom prst="rect">
-            <a:avLst/>
-          </a:prstGeom>
-        </p:spPr>
-      </p:pic>
-    </p:spTree>
-    <p:extLst>
-      <p:ext uri="{BB962C8B-B14F-4D97-AF65-F5344CB8AC3E}">
-        <p14:creationId xmlns:p14="http://schemas.microsoft.com/office/powerpoint/2010/main" val="3220598409"/>
       </p:ext>
     </p:extLst>
   </p:cSld>
